--- a/data/EVRAZ_Agent_defense.pptx
+++ b/data/EVRAZ_Agent_defense.pptx
@@ -7801,13 +7801,13 @@
               <a:t>4</a:t>
             </a:r>
             <a:r>
-              <a:rPr lang="ru-RU" sz="2900" b="1" i="0" dirty="0">
+              <a:rPr lang="en-US" sz="2900" b="1" dirty="0">
                 <a:solidFill>
                   <a:srgbClr val="2E7D32"/>
                 </a:solidFill>
                 <a:latin typeface="Calibri"/>
               </a:rPr>
-              <a:t>6</a:t>
+              <a:t>8</a:t>
             </a:r>
             <a:endParaRPr sz="2900" b="1" i="0" dirty="0">
               <a:solidFill>
@@ -7827,7 +7827,7 @@
         <p:spPr>
           <a:xfrm>
             <a:off x="3465576" y="2907792"/>
-            <a:ext cx="2395728" cy="457200"/>
+            <a:ext cx="2395728" cy="183320"/>
           </a:xfrm>
           <a:prstGeom prst="rect">
             <a:avLst/>
@@ -7846,13 +7846,58 @@
               </a:lnSpc>
             </a:pPr>
             <a:r>
-              <a:rPr sz="1200" b="1" i="0">
+              <a:rPr sz="1200" b="1" i="0" dirty="0" err="1">
                 <a:solidFill>
                   <a:srgbClr val="FFFFFF"/>
                 </a:solidFill>
                 <a:latin typeface="Calibri"/>
               </a:rPr>
-              <a:t>Прошли успешно — 88%</a:t>
+              <a:t>Прошли</a:t>
+            </a:r>
+            <a:r>
+              <a:rPr sz="1200" b="1" i="0" dirty="0">
+                <a:solidFill>
+                  <a:srgbClr val="FFFFFF"/>
+                </a:solidFill>
+                <a:latin typeface="Calibri"/>
+              </a:rPr>
+              <a:t> </a:t>
+            </a:r>
+            <a:r>
+              <a:rPr sz="1200" b="1" i="0" dirty="0" err="1">
+                <a:solidFill>
+                  <a:srgbClr val="FFFFFF"/>
+                </a:solidFill>
+                <a:latin typeface="Calibri"/>
+              </a:rPr>
+              <a:t>успешно</a:t>
+            </a:r>
+            <a:r>
+              <a:rPr sz="1200" b="1" i="0" dirty="0">
+                <a:solidFill>
+                  <a:srgbClr val="FFFFFF"/>
+                </a:solidFill>
+                <a:latin typeface="Calibri"/>
+              </a:rPr>
+              <a:t> — </a:t>
+            </a:r>
+            <a:r>
+              <a:rPr lang="en-US" sz="1200" b="1" i="0" dirty="0">
+                <a:solidFill>
+                  <a:srgbClr val="FFFFFF"/>
+                </a:solidFill>
+                <a:latin typeface="Calibri"/>
+              </a:rPr>
+              <a:t>92</a:t>
+            </a:r>
+            <a:r>
+              <a:rPr sz="1200" b="1" i="0" dirty="0">
+                <a:solidFill>
+                  <a:srgbClr val="FFFFFF"/>
+                </a:solidFill>
+                <a:latin typeface="Calibri"/>
+              </a:rPr>
+              <a:t>%</a:t>
             </a:r>
           </a:p>
         </p:txBody>
@@ -9560,7 +9605,7 @@
         <p:spPr>
           <a:xfrm>
             <a:off x="9400032" y="5939027"/>
-            <a:ext cx="1682496" cy="219456"/>
+            <a:ext cx="1682496" cy="161583"/>
           </a:xfrm>
           <a:prstGeom prst="rect">
             <a:avLst/>
@@ -9579,13 +9624,22 @@
               </a:lnSpc>
             </a:pPr>
             <a:r>
-              <a:rPr sz="1050" b="1" i="0">
+              <a:rPr lang="en-US" sz="1050" b="1" dirty="0">
                 <a:solidFill>
                   <a:srgbClr val="FF5A36"/>
                 </a:solidFill>
                 <a:latin typeface="Calibri"/>
               </a:rPr>
-              <a:t>88%</a:t>
+              <a:t>92</a:t>
+            </a:r>
+            <a:r>
+              <a:rPr sz="1050" b="1" i="0" dirty="0">
+                <a:solidFill>
+                  <a:srgbClr val="FF5A36"/>
+                </a:solidFill>
+                <a:latin typeface="Calibri"/>
+              </a:rPr>
+              <a:t>%</a:t>
             </a:r>
           </a:p>
         </p:txBody>
@@ -15505,7 +15559,7 @@
           </a:prstGeom>
           <a:extLst>
             <a:ext uri="{C572A759-6A51-4108-AA02-DFA0A04FC94B}">
-              <ma14:wrappingTextBoxFlag xmlns:ma14="http://schemas.microsoft.com/office/mac/drawingml/2011/main" xmlns="" val="0"/>
+              <ma14:wrappingTextBoxFlag xmlns="" xmlns:ma14="http://schemas.microsoft.com/office/mac/drawingml/2011/main" val="0"/>
             </a:ext>
           </a:extLst>
         </p:spPr>
@@ -16321,7 +16375,7 @@
           </a:prstGeom>
           <a:extLst>
             <a:ext uri="{C572A759-6A51-4108-AA02-DFA0A04FC94B}">
-              <ma14:wrappingTextBoxFlag xmlns="" xmlns:ma14="http://schemas.microsoft.com/office/mac/drawingml/2011/main" val="0"/>
+              <ma14:wrappingTextBoxFlag xmlns:ma14="http://schemas.microsoft.com/office/mac/drawingml/2011/main" xmlns="" val="0"/>
             </a:ext>
           </a:extLst>
         </p:spPr>
@@ -19744,7 +19798,7 @@
           </a:prstGeom>
           <a:extLst>
             <a:ext uri="{C572A759-6A51-4108-AA02-DFA0A04FC94B}">
-              <ma14:wrappingTextBoxFlag xmlns:ma14="http://schemas.microsoft.com/office/mac/drawingml/2011/main" xmlns="" val="0"/>
+              <ma14:wrappingTextBoxFlag xmlns="" xmlns:ma14="http://schemas.microsoft.com/office/mac/drawingml/2011/main" val="0"/>
             </a:ext>
           </a:extLst>
         </p:spPr>
@@ -21287,7 +21341,7 @@
           </a:prstGeom>
           <a:extLst>
             <a:ext uri="{C572A759-6A51-4108-AA02-DFA0A04FC94B}">
-              <ma14:wrappingTextBoxFlag xmlns="" xmlns:ma14="http://schemas.microsoft.com/office/mac/drawingml/2011/main" val="0"/>
+              <ma14:wrappingTextBoxFlag xmlns:ma14="http://schemas.microsoft.com/office/mac/drawingml/2011/main" xmlns="" val="0"/>
             </a:ext>
           </a:extLst>
         </p:spPr>
